--- a/viewers/pptx/e2e/fixtures/chart-title-runs.pptx
+++ b/viewers/pptx/e2e/fixtures/chart-title-runs.pptx
@@ -37,7 +37,7 @@
           <a:p>
             <a:r>
               <a:rPr lang="en-US" b="1"/>
-              <a:t>Sales </a:t>
+              <a:t xml:space="preserve">Sales </a:t>
             </a:r>
             <a:r>
               <a:rPr lang="en-US" i="1">
